--- a/30-out/4. 최종 발표 슬라이드.pptx
+++ b/30-out/4. 최종 발표 슬라이드.pptx
@@ -881,7 +881,7 @@
           <a:p>
             <a:r>
               <a:rPr lang="en-US" dirty="0"/>
-              <a:t>개인 결과에서 오래 끌지 마세요. '같은 이름 다른 곳'과 전체 목록에서 멈춰야 문제가 전달됩니다. 인터넷이 끊기면 녹화본으로 넘어가세요.</a:t>
+              <a:t>개인 결과에서 오래 끌지 마세요. '같은 이름 다른 곳'과 전체 목록에서 멈춰야 문제가 전달됩니다. 마지막에 결과 카드를 이미지로 저장하는 것까지 보여주면 확산 질문을 미리 막습니다. 인터넷이 끊기면 녹화본으로 넘어가세요.</a:t>
             </a:r>
             <a:endParaRPr lang="en-US" dirty="0"/>
           </a:p>
@@ -2500,7 +2500,7 @@
       </p:sp>
       <p:pic>
         <p:nvPicPr>
-          <p:cNvPr id="3" name="Image 0" descr="/Users/ijuhwan/leejuhwan/1-active/2608-yeonggwang-food/20-assets/QR_발표장용.png">    </p:cNvPr>
+          <p:cNvPr id="3" name="Image 0" descr="/Users/ijuhwan/leejuhwan/1-active/2608-geofood/20-assets/QR_발표장용.png">    </p:cNvPr>
           <p:cNvPicPr>
             <a:picLocks noChangeAspect="1"/>
           </p:cNvPicPr>
@@ -2647,7 +2647,7 @@
         </p:nvSpPr>
         <p:spPr>
           <a:xfrm>
-            <a:off x="777240" y="5257800"/>
+            <a:off x="777240" y="5212080"/>
             <a:ext cx="10637215" cy="457200"/>
           </a:xfrm>
           <a:prstGeom prst="rect">
@@ -2664,7 +2664,7 @@
               <a:buNone/>
             </a:pPr>
             <a:r>
-              <a:rPr lang="en-US" sz="1500" dirty="0">
+              <a:rPr lang="en-US" sz="1400" dirty="0">
                 <a:solidFill>
                   <a:srgbClr val="7E8C8A"/>
                 </a:solidFill>
@@ -2672,9 +2672,48 @@
                 <a:ea typeface="맑은 고딕" pitchFamily="34" charset="-122"/>
                 <a:cs typeface="맑은 고딕" pitchFamily="34" charset="-120"/>
               </a:rPr>
-              <a:t>심사위원 생일 → 결과 → 같은 이름 다른 곳 → 그 지역 → 전체 목록 → 시도 배치도</a:t>
-            </a:r>
-            <a:endParaRPr lang="en-US" sz="1500" dirty="0"/>
+              <a:t>심사위원 생일 → 결과 → 같은 이름 다른 곳 → 그 지역 → 전체 목록 → 시도 배치도 → 결과 카드 저장</a:t>
+            </a:r>
+            <a:endParaRPr lang="en-US" sz="1400" dirty="0"/>
+          </a:p>
+        </p:txBody>
+      </p:sp>
+      <p:sp>
+        <p:nvSpPr>
+          <p:cNvPr id="8" name="Text 5"/>
+          <p:cNvSpPr/>
+          <p:nvPr/>
+        </p:nvSpPr>
+        <p:spPr>
+          <a:xfrm>
+            <a:off x="777240" y="5623560"/>
+            <a:ext cx="10637215" cy="411480"/>
+          </a:xfrm>
+          <a:prstGeom prst="rect">
+            <a:avLst/>
+          </a:prstGeom>
+          <a:noFill/>
+          <a:ln/>
+        </p:spPr>
+        <p:txBody>
+          <a:bodyPr wrap="square" lIns="0" tIns="0" rIns="0" bIns="0" rtlCol="0" anchor="ctr"/>
+          <a:lstStyle/>
+          <a:p>
+            <a:pPr indent="0" marL="0">
+              <a:buNone/>
+            </a:pPr>
+            <a:r>
+              <a:rPr lang="en-US" sz="1300" dirty="0">
+                <a:solidFill>
+                  <a:srgbClr val="9CACA9"/>
+                </a:solidFill>
+                <a:latin typeface="맑은 고딕" pitchFamily="34" charset="0"/>
+                <a:ea typeface="맑은 고딕" pitchFamily="34" charset="-122"/>
+                <a:cs typeface="맑은 고딕" pitchFamily="34" charset="-120"/>
+              </a:rPr>
+              <a:t>결과 카드는 이미지로 저장돼 그대로 공유됩니다. 카드에 주소가 박혀 있습니다.</a:t>
+            </a:r>
+            <a:endParaRPr lang="en-US" sz="1300" dirty="0"/>
           </a:p>
         </p:txBody>
       </p:sp>
